--- a/curso_es/pptx/S13.pptx
+++ b/curso_es/pptx/S13.pptx
@@ -4109,7 +4109,7 @@
                 </a:solidFill>
                 <a:latin typeface="Nunito Sans"/>
               </a:rPr>
-              <a:t>Naiara: «Hoy me llevo el paraguas porque la app del tiempo da un 90 % de lluvia y el cielo está negro.»</a:t>
+              <a:t>Una chica: «Hoy me llevo el paraguas porque la app del tiempo da un 90 % de lluvia y el cielo está negro.»</a:t>
             </a:r>
           </a:p>
         </p:txBody>
@@ -4796,7 +4796,7 @@
                 </a:solidFill>
                 <a:latin typeface="Nunito Sans"/>
               </a:rPr>
-              <a:t>Aitor: «Fumar es malo para la salud. Lo sé porque lo dice mi youtuber de videojuegos favorito».</a:t>
+              <a:t>Un chico: «Fumar es malo para la salud. Lo sé porque lo dice mi youtuber de videojuegos favorito».</a:t>
             </a:r>
           </a:p>
         </p:txBody>
